--- a/public/fun/pack/pptx/familypro/가족소개프리미엄_23_3대가족_터콰이즈골드.pptx
+++ b/public/fun/pack/pptx/familypro/가족소개프리미엄_23_3대가족_터콰이즈골드.pptx
@@ -113,12 +113,12 @@
   <p:extLst>
     <p:ext uri="{521415D9-36F7-43E2-AB2F-B90AF26B5E84}">
       <p14:sectionLst xmlns:p14="http://schemas.microsoft.com/office/powerpoint/2010/main">
-        <p14:section name="시작" id="{9F07C7BB-FC5F-4081-8513-1417EF780F0D}">
+        <p14:section name="시작" id="{AB9F6D24-CADC-4D71-9DB8-979C60D8DC60}">
           <p14:sldIdLst>
             <p14:sldId id="256"/>
           </p14:sldIdLst>
         </p14:section>
-        <p14:section name="본문" id="{AD4F1725-AEC4-485E-BCF2-6EA223653E6D}">
+        <p14:section name="본문" id="{C00D3A78-5E43-44E5-845E-B57696BCE056}">
           <p14:sldIdLst>
             <p14:sldId id="257"/>
             <p14:sldId id="258"/>
@@ -127,7 +127,7 @@
             <p14:sldId id="261"/>
           </p14:sldIdLst>
         </p14:section>
-        <p14:section name="마무리" id="{AF76BB42-420E-4037-AF1F-B44A87EB4383}">
+        <p14:section name="마무리" id="{A77BCAE7-69C8-4AEF-ABCF-1723EF148412}">
           <p14:sldIdLst>
             <p14:sldId id="262"/>
           </p14:sldIdLst>
@@ -1645,7 +1645,7 @@
             </a:lvl1pPr>
           </a:lstStyle>
           <a:p>
-            <a:fld id="{A6E8465B-CCC9-4171-A970-09F8631DB6DD}" type="slidenum">
+            <a:fld id="{571B2AE6-7B8E-434A-8375-6E1D3EFDC12E}" type="slidenum">
               <a:rPr lang="en-US"/>
               <a:t>‹#›</a:t>
             </a:fld>
@@ -2456,7 +2456,7 @@
             </a:lvl1pPr>
           </a:lstStyle>
           <a:p>
-            <a:fld id="{8D12FF99-710E-4F1C-9AD5-EFD3FF8FC23E}" type="slidenum">
+            <a:fld id="{86686F5D-8E85-4F8B-B10D-F9AB67969E7B}" type="slidenum">
               <a:rPr lang="en-US"/>
               <a:t>‹#›</a:t>
             </a:fld>
@@ -3140,7 +3140,7 @@
             </a:lvl1pPr>
           </a:lstStyle>
           <a:p>
-            <a:fld id="{BD73E25E-27EC-42E6-BBAF-166BA129570A}" type="slidenum">
+            <a:fld id="{80792834-223C-4562-AEF7-1A8A13189FA0}" type="slidenum">
               <a:rPr lang="en-US"/>
               <a:t>‹#›</a:t>
             </a:fld>
@@ -3985,7 +3985,7 @@
           <a:p>
             <a:r>
               <a:rPr lang="ko-KR"/>
-              <a:t>3대 가족 · 0000. 00. 00</a:t>
+              <a:t>3대 가족 · 날짜 입력</a:t>
             </a:r>
           </a:p>
         </p:txBody>
@@ -4484,7 +4484,7 @@
           <a:bodyPr/>
           <a:lstStyle/>
           <a:p>
-            <a:fld id="{BDC9BF81-2FBD-4A65-9155-17491D76453B}" type="slidenum">
+            <a:fld id="{A37621D2-97B7-48C0-B7C3-A4AA3B689A19}" type="slidenum">
               <a:rPr lang="en-US"/>
               <a:t>‹#›</a:t>
             </a:fld>
@@ -5532,7 +5532,7 @@
           <a:bodyPr/>
           <a:lstStyle/>
           <a:p>
-            <a:fld id="{5D6D8CA4-C4E6-49D2-8574-055672776174}" type="slidenum">
+            <a:fld id="{3E0EC2AA-9972-4F9C-96E8-54FA481E7EE1}" type="slidenum">
               <a:rPr lang="en-US"/>
               <a:t>‹#›</a:t>
             </a:fld>
@@ -6374,7 +6374,7 @@
           <a:bodyPr/>
           <a:lstStyle/>
           <a:p>
-            <a:fld id="{B95EC246-BBAF-44E4-98AD-099F43074E9B}" type="slidenum">
+            <a:fld id="{CD4AF488-95DC-4659-AF71-834D91213522}" type="slidenum">
               <a:rPr lang="en-US"/>
               <a:t>‹#›</a:t>
             </a:fld>
@@ -7668,7 +7668,7 @@
           <a:bodyPr/>
           <a:lstStyle/>
           <a:p>
-            <a:fld id="{5A2FC7B5-4B62-4624-8E43-B4085C9CD2EC}" type="slidenum">
+            <a:fld id="{2606002D-2455-440E-9B7B-D099995A771F}" type="slidenum">
               <a:rPr lang="en-US"/>
               <a:t>‹#›</a:t>
             </a:fld>
@@ -7756,7 +7756,7 @@
           <a:bodyPr/>
           <a:lstStyle/>
           <a:p>
-            <a:fld id="{0179C2AC-33D7-436D-92B8-1F16C03D2C3F}" type="slidenum">
+            <a:fld id="{A71E1019-0241-4873-9EF4-D0FD7C278E2E}" type="slidenum">
               <a:rPr lang="en-US"/>
               <a:t>‹#›</a:t>
             </a:fld>
